--- a/templates/office/EMP_DEG_040_TOBE_프로세스정의서.pptx
+++ b/templates/office/EMP_DEG_040_TOBE_프로세스정의서.pptx
@@ -2509,7 +2509,7 @@
               </a:defRPr>
             </a:pPr>
             <a:r>
-              <a:t>한빛글로벌 SyncGuard AI 시스템 구축</a:t>
+              <a:t>한빛글로벌 SyncFlow AI 시스템 구축</a:t>
             </a:r>
           </a:p>
           <a:p>
@@ -2668,7 +2668,7 @@
                       <a:pPr algn="ctr">
                         <a:defRPr sz="900" b="1">
                           <a:solidFill>
-                            <a:srgbClr val="1E293B"/>
+                            <a:srgbClr val="0F2942"/>
                           </a:solidFill>
                         </a:defRPr>
                       </a:pPr>
@@ -2720,7 +2720,7 @@
                       <a:pPr latinLnBrk="1" algn="ctr">
                         <a:defRPr sz="900">
                           <a:solidFill>
-                            <a:srgbClr val="1E293B"/>
+                            <a:srgbClr val="0F2942"/>
                           </a:solidFill>
                         </a:defRPr>
                       </a:pPr>
@@ -2737,7 +2737,7 @@
                       <a:pPr algn="ctr">
                         <a:defRPr sz="900" b="1">
                           <a:solidFill>
-                            <a:srgbClr val="1E293B"/>
+                            <a:srgbClr val="0F2942"/>
                           </a:solidFill>
                         </a:defRPr>
                       </a:pPr>
@@ -2789,7 +2789,7 @@
                       <a:pPr latinLnBrk="1" algn="ctr">
                         <a:defRPr sz="900">
                           <a:solidFill>
-                            <a:srgbClr val="1E293B"/>
+                            <a:srgbClr val="0F2942"/>
                           </a:solidFill>
                         </a:defRPr>
                       </a:pPr>
@@ -2813,7 +2813,7 @@
                       <a:pPr algn="ctr">
                         <a:defRPr sz="900">
                           <a:solidFill>
-                            <a:srgbClr val="1E293B"/>
+                            <a:srgbClr val="0F2942"/>
                           </a:solidFill>
                         </a:defRPr>
                       </a:pPr>
@@ -2869,7 +2869,7 @@
                       <a:pPr algn="ctr" fontAlgn="ctr">
                         <a:defRPr sz="900">
                           <a:solidFill>
-                            <a:srgbClr val="1E293B"/>
+                            <a:srgbClr val="0F2942"/>
                           </a:solidFill>
                         </a:defRPr>
                       </a:pPr>
@@ -2945,7 +2945,7 @@
                       <a:pPr algn="ctr">
                         <a:defRPr sz="900">
                           <a:solidFill>
-                            <a:srgbClr val="1E293B"/>
+                            <a:srgbClr val="0F2942"/>
                           </a:solidFill>
                         </a:defRPr>
                       </a:pPr>
@@ -3006,7 +3006,7 @@
                       <a:pPr algn="ctr" fontAlgn="ctr">
                         <a:defRPr sz="900">
                           <a:solidFill>
-                            <a:srgbClr val="1E293B"/>
+                            <a:srgbClr val="0F2942"/>
                           </a:solidFill>
                         </a:defRPr>
                       </a:pPr>
@@ -3076,7 +3076,7 @@
                       <a:pPr algn="ctr">
                         <a:defRPr sz="900">
                           <a:solidFill>
-                            <a:srgbClr val="1E293B"/>
+                            <a:srgbClr val="0F2942"/>
                           </a:solidFill>
                         </a:defRPr>
                       </a:pPr>
@@ -3128,7 +3128,7 @@
                       <a:pPr latinLnBrk="1" algn="ctr">
                         <a:defRPr sz="900">
                           <a:solidFill>
-                            <a:srgbClr val="1E293B"/>
+                            <a:srgbClr val="0F2942"/>
                           </a:solidFill>
                         </a:defRPr>
                       </a:pPr>
@@ -3145,7 +3145,7 @@
                       <a:pPr algn="ctr">
                         <a:defRPr sz="900">
                           <a:solidFill>
-                            <a:srgbClr val="1E293B"/>
+                            <a:srgbClr val="0F2942"/>
                           </a:solidFill>
                         </a:defRPr>
                       </a:pPr>
@@ -3197,7 +3197,7 @@
                       <a:pPr latinLnBrk="1" algn="ctr">
                         <a:defRPr sz="900">
                           <a:solidFill>
-                            <a:srgbClr val="1E293B"/>
+                            <a:srgbClr val="0F2942"/>
                           </a:solidFill>
                         </a:defRPr>
                       </a:pPr>
@@ -3247,7 +3247,7 @@
             <a:pPr>
               <a:defRPr sz="900">
                 <a:solidFill>
-                  <a:srgbClr val="334155"/>
+                  <a:srgbClr val="1E3A5F"/>
                 </a:solidFill>
               </a:defRPr>
             </a:pPr>
@@ -3259,7 +3259,7 @@
             <a:pPr>
               <a:defRPr sz="900">
                 <a:solidFill>
-                  <a:srgbClr val="334155"/>
+                  <a:srgbClr val="1E3A5F"/>
                 </a:solidFill>
               </a:defRPr>
             </a:pPr>
@@ -3531,7 +3531,7 @@
                       <a:pPr algn="ctr">
                         <a:defRPr sz="800" b="1">
                           <a:solidFill>
-                            <a:srgbClr val="1E293B"/>
+                            <a:srgbClr val="0F2942"/>
                           </a:solidFill>
                         </a:defRPr>
                       </a:pPr>
@@ -3550,7 +3550,7 @@
                       <a:pPr>
                         <a:defRPr sz="800">
                           <a:solidFill>
-                            <a:srgbClr val="1E293B"/>
+                            <a:srgbClr val="0F2942"/>
                           </a:solidFill>
                         </a:defRPr>
                       </a:pPr>
@@ -3569,7 +3569,7 @@
                       <a:pPr>
                         <a:defRPr sz="800">
                           <a:solidFill>
-                            <a:srgbClr val="1E293B"/>
+                            <a:srgbClr val="0F2942"/>
                           </a:solidFill>
                         </a:defRPr>
                       </a:pPr>
@@ -3581,19 +3581,19 @@
                       <a:pPr>
                         <a:defRPr sz="800">
                           <a:solidFill>
-                            <a:srgbClr val="1E293B"/>
+                            <a:srgbClr val="0F2942"/>
                           </a:solidFill>
                         </a:defRPr>
                       </a:pPr>
                       <a:r>
-                        <a:t>2. 사용자: 2D Canvas 시안 원본 위치를 보며 직접 텍스트 인라인 수동 교정</a:t>
+                        <a:t>2. 사용자: 2D Canvas 계약·도서 원본 위치를 보며 직접 텍스트 인라인 수동 교정</a:t>
                       </a:r>
                     </a:p>
                     <a:p>
                       <a:pPr>
                         <a:defRPr sz="800">
                           <a:solidFill>
-                            <a:srgbClr val="1E293B"/>
+                            <a:srgbClr val="0F2942"/>
                           </a:solidFill>
                         </a:defRPr>
                       </a:pPr>
@@ -3614,7 +3614,7 @@
                       <a:pPr algn="ctr">
                         <a:defRPr sz="800" b="1">
                           <a:solidFill>
-                            <a:srgbClr val="1E293B"/>
+                            <a:srgbClr val="0F2942"/>
                           </a:solidFill>
                         </a:defRPr>
                       </a:pPr>
@@ -3633,12 +3633,12 @@
                       <a:pPr>
                         <a:defRPr sz="800">
                           <a:solidFill>
-                            <a:srgbClr val="1E293B"/>
+                            <a:srgbClr val="0F2942"/>
                           </a:solidFill>
                         </a:defRPr>
                       </a:pPr>
                       <a:r>
-                        <a:t>MarketingHub, [Option] KT 레몬 등 사내 타 시스템 점검 또는 네트워크 일시 단절</a:t>
+                        <a:t>SRM-Portal, [Option] HB-Monitor 등 사내 타 시스템 점검 또는 네트워크 일시 단절</a:t>
                       </a:r>
                     </a:p>
                   </a:txBody>
@@ -3652,7 +3652,7 @@
                       <a:pPr>
                         <a:defRPr sz="800">
                           <a:solidFill>
-                            <a:srgbClr val="1E293B"/>
+                            <a:srgbClr val="0F2942"/>
                           </a:solidFill>
                         </a:defRPr>
                       </a:pPr>
@@ -3664,7 +3664,7 @@
                       <a:pPr>
                         <a:defRPr sz="800">
                           <a:solidFill>
-                            <a:srgbClr val="1E293B"/>
+                            <a:srgbClr val="0F2942"/>
                           </a:solidFill>
                         </a:defRPr>
                       </a:pPr>
@@ -3676,12 +3676,12 @@
                       <a:pPr>
                         <a:defRPr sz="800">
                           <a:solidFill>
-                            <a:srgbClr val="1E293B"/>
+                            <a:srgbClr val="0F2942"/>
                           </a:solidFill>
                         </a:defRPr>
                       </a:pPr>
                       <a:r>
-                        <a:t>3. SyncGuard AI 자체 판정 기능은 중단 없이 정상 가동</a:t>
+                        <a:t>3. SyncFlow AI 자체 판정 기능은 중단 없이 정상 가동</a:t>
                       </a:r>
                     </a:p>
                   </a:txBody>
@@ -3697,7 +3697,7 @@
                       <a:pPr algn="ctr">
                         <a:defRPr sz="800" b="1">
                           <a:solidFill>
-                            <a:srgbClr val="1E293B"/>
+                            <a:srgbClr val="0F2942"/>
                           </a:solidFill>
                         </a:defRPr>
                       </a:pPr>
@@ -3716,7 +3716,7 @@
                       <a:pPr>
                         <a:defRPr sz="800">
                           <a:solidFill>
-                            <a:srgbClr val="1E293B"/>
+                            <a:srgbClr val="0F2942"/>
                           </a:solidFill>
                         </a:defRPr>
                       </a:pPr>
@@ -3735,7 +3735,7 @@
                       <a:pPr>
                         <a:defRPr sz="800">
                           <a:solidFill>
-                            <a:srgbClr val="1E293B"/>
+                            <a:srgbClr val="0F2942"/>
                           </a:solidFill>
                         </a:defRPr>
                       </a:pPr>
@@ -3747,7 +3747,7 @@
                       <a:pPr>
                         <a:defRPr sz="800">
                           <a:solidFill>
-                            <a:srgbClr val="1E293B"/>
+                            <a:srgbClr val="0F2942"/>
                           </a:solidFill>
                         </a:defRPr>
                       </a:pPr>
@@ -3759,12 +3759,12 @@
                       <a:pPr>
                         <a:defRPr sz="800">
                           <a:solidFill>
-                            <a:srgbClr val="1E293B"/>
+                            <a:srgbClr val="0F2942"/>
                           </a:solidFill>
                         </a:defRPr>
                       </a:pPr>
                       <a:r>
-                        <a:t>3. 화면 상단에 '심의 보조 엔진 재시도 중' 상태 메시지 투명 노출</a:t>
+                        <a:t>3. 화면 상단에 '검증 보조 엔진 재시도 중' 상태 메시지 투명 노출</a:t>
                       </a:r>
                     </a:p>
                   </a:txBody>
@@ -7551,7 +7551,7 @@
                       <a:pPr algn="ctr">
                         <a:defRPr sz="900">
                           <a:solidFill>
-                            <a:srgbClr val="1E293B"/>
+                            <a:srgbClr val="0F2942"/>
                           </a:solidFill>
                         </a:defRPr>
                       </a:pPr>
@@ -7748,7 +7748,7 @@
                       <a:pPr algn="ctr">
                         <a:defRPr sz="900">
                           <a:solidFill>
-                            <a:srgbClr val="1E293B"/>
+                            <a:srgbClr val="0F2942"/>
                           </a:solidFill>
                         </a:defRPr>
                       </a:pPr>
@@ -7947,7 +7947,7 @@
                       <a:pPr algn="ctr">
                         <a:defRPr sz="900">
                           <a:solidFill>
-                            <a:srgbClr val="1E293B"/>
+                            <a:srgbClr val="0F2942"/>
                           </a:solidFill>
                         </a:defRPr>
                       </a:pPr>
@@ -8146,12 +8146,12 @@
                       <a:pPr algn="ctr">
                         <a:defRPr sz="900">
                           <a:solidFill>
-                            <a:srgbClr val="1E293B"/>
+                            <a:srgbClr val="0F2942"/>
                           </a:solidFill>
                         </a:defRPr>
                       </a:pPr>
                       <a:r>
-                        <a:t>SyncGuard AI TO-BE 프로세스 및 역할별 워크플로우 정의</a:t>
+                        <a:t>SyncFlow AI TO-BE 프로세스 및 역할별 워크플로우 정의</a:t>
                       </a:r>
                     </a:p>
                   </a:txBody>
@@ -8215,7 +8215,7 @@
                       <a:pPr algn="ctr">
                         <a:defRPr sz="900">
                           <a:solidFill>
-                            <a:srgbClr val="1E293B"/>
+                            <a:srgbClr val="0F2942"/>
                           </a:solidFill>
                         </a:defRPr>
                       </a:pPr>
@@ -8414,7 +8414,7 @@
                       <a:pPr algn="ctr">
                         <a:defRPr sz="900">
                           <a:solidFill>
-                            <a:srgbClr val="1E293B"/>
+                            <a:srgbClr val="0F2942"/>
                           </a:solidFill>
                         </a:defRPr>
                       </a:pPr>
@@ -18830,7 +18830,7 @@
               </a:spcAft>
               <a:defRPr sz="1300" b="1">
                 <a:solidFill>
-                  <a:srgbClr val="1E293B"/>
+                  <a:srgbClr val="0F2942"/>
                 </a:solidFill>
               </a:defRPr>
             </a:pPr>
@@ -18850,7 +18850,7 @@
               </a:defRPr>
             </a:pPr>
             <a:r>
-              <a:t>    • 마케터, 연구원, RA 전문가, 시스템 연계 간의 전체 흐름도</a:t>
+              <a:t>    • 구매담당자, 연구원, 법무·QA 전문위원, 시스템 연계 간의 전체 흐름도</a:t>
             </a:r>
           </a:p>
           <a:p>
@@ -18860,12 +18860,12 @@
               </a:spcAft>
               <a:defRPr sz="1300" b="1">
                 <a:solidFill>
-                  <a:srgbClr val="1E293B"/>
+                  <a:srgbClr val="0F2942"/>
                 </a:solidFill>
               </a:defRPr>
             </a:pPr>
             <a:r>
-              <a:t>2. 마케터(Marketer) 세부 업무 절차</a:t>
+              <a:t>2. 구매담당자(Buyer) 세부 업무 절차</a:t>
             </a:r>
           </a:p>
           <a:p>
@@ -18880,7 +18880,7 @@
               </a:defRPr>
             </a:pPr>
             <a:r>
-              <a:t>    • 시안 등록, OCR 텍스트 정제, AI 1차 피드백 확인, 최종 결과서 수령</a:t>
+              <a:t>    • 계약·도서 등록, OCR 텍스트 정제, AI 1차 피드백 확인, 최종 결과서 수령</a:t>
             </a:r>
           </a:p>
           <a:p>
@@ -18890,7 +18890,7 @@
               </a:spcAft>
               <a:defRPr sz="1300" b="1">
                 <a:solidFill>
-                  <a:srgbClr val="1E293B"/>
+                  <a:srgbClr val="0F2942"/>
                 </a:solidFill>
               </a:defRPr>
             </a:pPr>
@@ -18910,7 +18910,7 @@
               </a:defRPr>
             </a:pPr>
             <a:r>
-              <a:t>    • 실증 검증 요청 접수, ProductLab 시험성적서 매핑, 실증 완료 처리</a:t>
+              <a:t>    • 시험검증 검증 요청 접수, PLM-Nexus 시험성적서 매핑, 시험검증 완료 처리</a:t>
             </a:r>
           </a:p>
           <a:p>
@@ -18920,12 +18920,12 @@
               </a:spcAft>
               <a:defRPr sz="1300" b="1">
                 <a:solidFill>
-                  <a:srgbClr val="1E293B"/>
+                  <a:srgbClr val="0F2942"/>
                 </a:solidFill>
               </a:defRPr>
             </a:pPr>
             <a:r>
-              <a:t>4. RA 전문가(RA Specialist) 세부 업무 절차</a:t>
+              <a:t>4. 법무·QA 전문위원(QA Specialist) 세부 업무 절차</a:t>
             </a:r>
           </a:p>
           <a:p>
@@ -18940,7 +18940,7 @@
               </a:defRPr>
             </a:pPr>
             <a:r>
-              <a:t>    • Side-by-Side 2D 시안 대조, 법적 근거 RAG 검토, 대체 표현 승인 및 심의 확정</a:t>
+              <a:t>    • Side-by-Side 2D 계약·도서 대조, 법적 근거 RAG 검토, 대체 표현 승인 및 검증 확정</a:t>
             </a:r>
           </a:p>
           <a:p>
@@ -18950,7 +18950,7 @@
               </a:spcAft>
               <a:defRPr sz="1300" b="1">
                 <a:solidFill>
-                  <a:srgbClr val="1E293B"/>
+                  <a:srgbClr val="0F2942"/>
                 </a:solidFill>
               </a:defRPr>
             </a:pPr>
@@ -18970,7 +18970,7 @@
               </a:defRPr>
             </a:pPr>
             <a:r>
-              <a:t>    • 표현 사전 갱신, 식약처 규제 문서 RAG 색인, 골든셋 자동 회귀 벤치마크</a:t>
+              <a:t>    • 표현 사전 갱신, 공정위·표준원 규제 문서 RAG 색인, 골든셋 자동 회귀 벤치마크</a:t>
             </a:r>
           </a:p>
           <a:p>
@@ -18980,7 +18980,7 @@
               </a:spcAft>
               <a:defRPr sz="1300" b="1">
                 <a:solidFill>
-                  <a:srgbClr val="1E293B"/>
+                  <a:srgbClr val="0F2942"/>
                 </a:solidFill>
               </a:defRPr>
             </a:pPr>
@@ -19000,7 +19000,7 @@
               </a:defRPr>
             </a:pPr>
             <a:r>
-              <a:t>    • SSO 단일인증, MarketingHub 광고심의 회신, [Option] KT 레몬 성분 동기화, ProductLab 연동</a:t>
+              <a:t>    • SSO 단일인증, SRM-Portal 계약·규격검증 회신, [Option] HB-Monitor 성분 동기화, PLM-Nexus 연동</a:t>
             </a:r>
           </a:p>
           <a:p>
@@ -19010,7 +19010,7 @@
               </a:spcAft>
               <a:defRPr sz="1300" b="1">
                 <a:solidFill>
-                  <a:srgbClr val="1E293B"/>
+                  <a:srgbClr val="0F2942"/>
                 </a:solidFill>
               </a:defRPr>
             </a:pPr>
@@ -19262,7 +19262,7 @@
                       <a:pPr algn="ctr">
                         <a:defRPr sz="800" b="1">
                           <a:solidFill>
-                            <a:srgbClr val="1E293B"/>
+                            <a:srgbClr val="0F2942"/>
                           </a:solidFill>
                         </a:defRPr>
                       </a:pPr>
@@ -19274,12 +19274,12 @@
                       <a:pPr algn="ctr">
                         <a:defRPr sz="800" b="1">
                           <a:solidFill>
-                            <a:srgbClr val="1E293B"/>
+                            <a:srgbClr val="0F2942"/>
                           </a:solidFill>
                         </a:defRPr>
                       </a:pPr>
                       <a:r>
-                        <a:t>시안 등록</a:t>
+                        <a:t>계약·도서 등록</a:t>
                       </a:r>
                     </a:p>
                   </a:txBody>
@@ -19293,12 +19293,12 @@
                       <a:pPr algn="ctr">
                         <a:defRPr sz="800" b="1">
                           <a:solidFill>
-                            <a:srgbClr val="1E293B"/>
+                            <a:srgbClr val="0F2942"/>
                           </a:solidFill>
                         </a:defRPr>
                       </a:pPr>
                       <a:r>
-                        <a:t>마케터</a:t>
+                        <a:t>구매담당자</a:t>
                       </a:r>
                     </a:p>
                   </a:txBody>
@@ -19312,12 +19312,12 @@
                       <a:pPr>
                         <a:defRPr sz="800">
                           <a:solidFill>
-                            <a:srgbClr val="1E293B"/>
+                            <a:srgbClr val="0F2942"/>
                           </a:solidFill>
                         </a:defRPr>
                       </a:pPr>
                       <a:r>
-                        <a:t>신규 프로모션 및 패키징 시안(PPTX/PDF/긴JPG 및 동영상(사용자 지정 장면 캡처)) 업로드, 브랜드 및 제품 기본정보 입력</a:t>
+                        <a:t>신규 차종 양산발주 및 부품사양 계약·도서(PPTX/PDF/긴JPG 및 설계도면(사용자 지정 장면 스냅샷)) 업로드, 사업본부 및 제품 기본정보 입력</a:t>
                       </a:r>
                     </a:p>
                   </a:txBody>
@@ -19331,24 +19331,24 @@
                       <a:pPr>
                         <a:defRPr sz="800">
                           <a:solidFill>
-                            <a:srgbClr val="1E293B"/>
+                            <a:srgbClr val="0F2942"/>
                           </a:solidFill>
                         </a:defRPr>
                       </a:pPr>
                       <a:r>
-                        <a:t>입력: 광고 시안 파일</a:t>
+                        <a:t>입력: 구매계약 계약·도서 파일</a:t>
                       </a:r>
                     </a:p>
                     <a:p>
                       <a:pPr>
                         <a:defRPr sz="800">
                           <a:solidFill>
-                            <a:srgbClr val="1E293B"/>
+                            <a:srgbClr val="0F2942"/>
                           </a:solidFill>
                         </a:defRPr>
                       </a:pPr>
                       <a:r>
-                        <a:t>출력: 심의신청번호(CLM...) 생성</a:t>
+                        <a:t>출력: 검증신청번호(REV...) 생성</a:t>
                       </a:r>
                     </a:p>
                   </a:txBody>
@@ -19364,7 +19364,7 @@
                       <a:pPr algn="ctr">
                         <a:defRPr sz="800" b="1">
                           <a:solidFill>
-                            <a:srgbClr val="1E293B"/>
+                            <a:srgbClr val="0F2942"/>
                           </a:solidFill>
                         </a:defRPr>
                       </a:pPr>
@@ -19376,7 +19376,7 @@
                       <a:pPr algn="ctr">
                         <a:defRPr sz="800" b="1">
                           <a:solidFill>
-                            <a:srgbClr val="1E293B"/>
+                            <a:srgbClr val="0F2942"/>
                           </a:solidFill>
                         </a:defRPr>
                       </a:pPr>
@@ -19395,7 +19395,7 @@
                       <a:pPr algn="ctr">
                         <a:defRPr sz="800" b="1">
                           <a:solidFill>
-                            <a:srgbClr val="1E293B"/>
+                            <a:srgbClr val="0F2942"/>
                           </a:solidFill>
                         </a:defRPr>
                       </a:pPr>
@@ -19414,12 +19414,12 @@
                       <a:pPr>
                         <a:defRPr sz="800">
                           <a:solidFill>
-                            <a:srgbClr val="1E293B"/>
+                            <a:srgbClr val="0F2942"/>
                           </a:solidFill>
                         </a:defRPr>
                       </a:pPr>
                       <a:r>
-                        <a:t>다중 엔진 문서 파싱 ➔ OCR 문장 추출 ➔ 3단계 점진적 판정(룰사전 차단 ➔ RAG 근거검색 ➔ LLM 문맥 심의)</a:t>
+                        <a:t>다중 엔진 문서 파싱 ➔ OCR 문장 추출 ➔ 3단계 점진적 판정(룰사전 차단 ➔ RAG 근거검색 ➔ LLM 문맥 검증)</a:t>
                       </a:r>
                     </a:p>
                   </a:txBody>
@@ -19433,7 +19433,7 @@
                       <a:pPr>
                         <a:defRPr sz="800">
                           <a:solidFill>
-                            <a:srgbClr val="1E293B"/>
+                            <a:srgbClr val="0F2942"/>
                           </a:solidFill>
                         </a:defRPr>
                       </a:pPr>
@@ -19445,7 +19445,7 @@
                       <a:pPr>
                         <a:defRPr sz="800">
                           <a:solidFill>
-                            <a:srgbClr val="1E293B"/>
+                            <a:srgbClr val="0F2942"/>
                           </a:solidFill>
                         </a:defRPr>
                       </a:pPr>
@@ -19466,7 +19466,7 @@
                       <a:pPr algn="ctr">
                         <a:defRPr sz="800" b="1">
                           <a:solidFill>
-                            <a:srgbClr val="1E293B"/>
+                            <a:srgbClr val="0F2942"/>
                           </a:solidFill>
                         </a:defRPr>
                       </a:pPr>
@@ -19478,12 +19478,12 @@
                       <a:pPr algn="ctr">
                         <a:defRPr sz="800" b="1">
                           <a:solidFill>
-                            <a:srgbClr val="1E293B"/>
+                            <a:srgbClr val="0F2942"/>
                           </a:solidFill>
                         </a:defRPr>
                       </a:pPr>
                       <a:r>
-                        <a:t>실증 매핑</a:t>
+                        <a:t>시험검증 매핑</a:t>
                       </a:r>
                     </a:p>
                   </a:txBody>
@@ -19497,7 +19497,7 @@
                       <a:pPr algn="ctr">
                         <a:defRPr sz="800" b="1">
                           <a:solidFill>
-                            <a:srgbClr val="1E293B"/>
+                            <a:srgbClr val="0F2942"/>
                           </a:solidFill>
                         </a:defRPr>
                       </a:pPr>
@@ -19516,12 +19516,12 @@
                       <a:pPr>
                         <a:defRPr sz="800">
                           <a:solidFill>
-                            <a:srgbClr val="1E293B"/>
+                            <a:srgbClr val="0F2942"/>
                           </a:solidFill>
                         </a:defRPr>
                       </a:pPr>
                       <a:r>
-                        <a:t>수치 및 지속시간 효능 소구 문장에 대해 ProductLab 인체적용시험 성적서 및 임상 데이터 매핑</a:t>
+                        <a:t>수치 및 지속시간 성능규격 기술사양 조항에 대해 PLM-Nexus 공인신뢰성시험 성적서 및 신뢰성 데이터 매핑</a:t>
                       </a:r>
                     </a:p>
                   </a:txBody>
@@ -19535,24 +19535,24 @@
                       <a:pPr>
                         <a:defRPr sz="800">
                           <a:solidFill>
-                            <a:srgbClr val="1E293B"/>
+                            <a:srgbClr val="0F2942"/>
                           </a:solidFill>
                         </a:defRPr>
                       </a:pPr>
                       <a:r>
-                        <a:t>입력: 실증 요청 알림</a:t>
+                        <a:t>입력: 시험검증 요청 알림</a:t>
                       </a:r>
                     </a:p>
                     <a:p>
                       <a:pPr>
                         <a:defRPr sz="800">
                           <a:solidFill>
-                            <a:srgbClr val="1E293B"/>
+                            <a:srgbClr val="0F2942"/>
                           </a:solidFill>
                         </a:defRPr>
                       </a:pPr>
                       <a:r>
-                        <a:t>출력: 실증자료번호(EVD...) 매핑 완료</a:t>
+                        <a:t>출력: 시험성적서번호(EVD...) 매핑 완료</a:t>
                       </a:r>
                     </a:p>
                   </a:txBody>
@@ -19568,7 +19568,7 @@
                       <a:pPr algn="ctr">
                         <a:defRPr sz="800" b="1">
                           <a:solidFill>
-                            <a:srgbClr val="1E293B"/>
+                            <a:srgbClr val="0F2942"/>
                           </a:solidFill>
                         </a:defRPr>
                       </a:pPr>
@@ -19580,12 +19580,12 @@
                       <a:pPr algn="ctr">
                         <a:defRPr sz="800" b="1">
                           <a:solidFill>
-                            <a:srgbClr val="1E293B"/>
+                            <a:srgbClr val="0F2942"/>
                           </a:solidFill>
                         </a:defRPr>
                       </a:pPr>
                       <a:r>
-                        <a:t>정밀 심의</a:t>
+                        <a:t>정밀 검증</a:t>
                       </a:r>
                     </a:p>
                   </a:txBody>
@@ -19599,12 +19599,12 @@
                       <a:pPr algn="ctr">
                         <a:defRPr sz="800" b="1">
                           <a:solidFill>
-                            <a:srgbClr val="1E293B"/>
+                            <a:srgbClr val="0F2942"/>
                           </a:solidFill>
                         </a:defRPr>
                       </a:pPr>
                       <a:r>
-                        <a:t>RA 전문가</a:t>
+                        <a:t>법무·QA 전문위원</a:t>
                       </a:r>
                     </a:p>
                   </a:txBody>
@@ -19618,12 +19618,12 @@
                       <a:pPr>
                         <a:defRPr sz="800">
                           <a:solidFill>
-                            <a:srgbClr val="1E293B"/>
+                            <a:srgbClr val="0F2942"/>
                           </a:solidFill>
                         </a:defRPr>
                       </a:pPr>
                       <a:r>
-                        <a:t>2D Canvas 뷰어로 시안 원본 위치와 AI 판정 대조 검토, 사내 추천 대체 표현 승인 및 심의 최종 확정</a:t>
+                        <a:t>2D Canvas 뷰어로 계약·도서 원본 위치와 AI 판정 대조 검토, 사내 추천 대체 표현 승인 및 검증 최종 확정</a:t>
                       </a:r>
                     </a:p>
                   </a:txBody>
@@ -19637,24 +19637,24 @@
                       <a:pPr>
                         <a:defRPr sz="800">
                           <a:solidFill>
-                            <a:srgbClr val="1E293B"/>
+                            <a:srgbClr val="0F2942"/>
                           </a:solidFill>
                         </a:defRPr>
                       </a:pPr>
                       <a:r>
-                        <a:t>입력: AI 판정 및 실증 데이터</a:t>
+                        <a:t>입력: AI 판정 및 시험검증 데이터</a:t>
                       </a:r>
                     </a:p>
                     <a:p>
                       <a:pPr>
                         <a:defRPr sz="800">
                           <a:solidFill>
-                            <a:srgbClr val="1E293B"/>
+                            <a:srgbClr val="0F2942"/>
                           </a:solidFill>
                         </a:defRPr>
                       </a:pPr>
                       <a:r>
-                        <a:t>출력: 심의 확정 상태 및 불변 감사로그</a:t>
+                        <a:t>출력: 검증 확정 상태 및 불변 감사로그</a:t>
                       </a:r>
                     </a:p>
                   </a:txBody>
@@ -19670,7 +19670,7 @@
                       <a:pPr algn="ctr">
                         <a:defRPr sz="800" b="1">
                           <a:solidFill>
-                            <a:srgbClr val="1E293B"/>
+                            <a:srgbClr val="0F2942"/>
                           </a:solidFill>
                         </a:defRPr>
                       </a:pPr>
@@ -19682,7 +19682,7 @@
                       <a:pPr algn="ctr">
                         <a:defRPr sz="800" b="1">
                           <a:solidFill>
-                            <a:srgbClr val="1E293B"/>
+                            <a:srgbClr val="0F2942"/>
                           </a:solidFill>
                         </a:defRPr>
                       </a:pPr>
@@ -19701,12 +19701,12 @@
                       <a:pPr algn="ctr">
                         <a:defRPr sz="800" b="1">
                           <a:solidFill>
-                            <a:srgbClr val="1E293B"/>
+                            <a:srgbClr val="0F2942"/>
                           </a:solidFill>
                         </a:defRPr>
                       </a:pPr>
                       <a:r>
-                        <a:t>마케터/연계</a:t>
+                        <a:t>구매담당자/연계</a:t>
                       </a:r>
                     </a:p>
                   </a:txBody>
@@ -19720,12 +19720,12 @@
                       <a:pPr>
                         <a:defRPr sz="800">
                           <a:solidFill>
-                            <a:srgbClr val="1E293B"/>
+                            <a:srgbClr val="0F2942"/>
                           </a:solidFill>
                         </a:defRPr>
                       </a:pPr>
                       <a:r>
-                        <a:t>MarketingHub 광고심의 시스템으로 결과 요약 및 PDF 리포트 URL 회신, 승인 문구 마케팅 제작 배포</a:t>
+                        <a:t>SRM-Portal 계약·규격검증 시스템으로 결과 요약 및 PDF 리포트 URL 회신, 승인 조항 구매조달 제작 배포</a:t>
                       </a:r>
                     </a:p>
                   </a:txBody>
@@ -19739,24 +19739,24 @@
                       <a:pPr>
                         <a:defRPr sz="800">
                           <a:solidFill>
-                            <a:srgbClr val="1E293B"/>
+                            <a:srgbClr val="0F2942"/>
                           </a:solidFill>
                         </a:defRPr>
                       </a:pPr>
                       <a:r>
-                        <a:t>입력: 최종 심의 확정 데이터</a:t>
+                        <a:t>입력: 최종 검증 확정 데이터</a:t>
                       </a:r>
                     </a:p>
                     <a:p>
                       <a:pPr>
                         <a:defRPr sz="800">
                           <a:solidFill>
-                            <a:srgbClr val="1E293B"/>
+                            <a:srgbClr val="0F2942"/>
                           </a:solidFill>
                         </a:defRPr>
                       </a:pPr>
                       <a:r>
-                        <a:t>출력: MarketingHub 회신 ACK, 공식 PDF 결과서</a:t>
+                        <a:t>출력: SRM-Portal 회신 ACK, 공식 PDF 결과서</a:t>
                       </a:r>
                     </a:p>
                   </a:txBody>
@@ -19886,7 +19886,7 @@
               </a:defRPr>
             </a:pPr>
             <a:r>
-              <a:t>2. 마케터(Marketer) 세부 업무 절차</a:t>
+              <a:t>2. 구매담당자(Buyer) 세부 업무 절차</a:t>
             </a:r>
           </a:p>
         </p:txBody>
@@ -20029,12 +20029,12 @@
                       <a:pPr algn="ctr">
                         <a:defRPr sz="800" b="1">
                           <a:solidFill>
-                            <a:srgbClr val="1E293B"/>
+                            <a:srgbClr val="0F2942"/>
                           </a:solidFill>
                         </a:defRPr>
                       </a:pPr>
                       <a:r>
-                        <a:t>1. 시안 접수</a:t>
+                        <a:t>1. 계약·도서 접수</a:t>
                       </a:r>
                     </a:p>
                   </a:txBody>
@@ -20048,12 +20048,12 @@
                       <a:pPr>
                         <a:defRPr sz="800">
                           <a:solidFill>
-                            <a:srgbClr val="1E293B"/>
+                            <a:srgbClr val="0F2942"/>
                           </a:solidFill>
                         </a:defRPr>
                       </a:pPr>
                       <a:r>
-                        <a:t>광고 시안 업로드 및 메타데이터 등록</a:t>
+                        <a:t>구매계약 계약·도서 업로드 및 메타데이터 등록</a:t>
                       </a:r>
                     </a:p>
                   </a:txBody>
@@ -20067,7 +20067,7 @@
                       <a:pPr>
                         <a:defRPr sz="800">
                           <a:solidFill>
-                            <a:srgbClr val="1E293B"/>
+                            <a:srgbClr val="0F2942"/>
                           </a:solidFill>
                         </a:defRPr>
                       </a:pPr>
@@ -20079,19 +20079,19 @@
                       <a:pPr>
                         <a:defRPr sz="800">
                           <a:solidFill>
-                            <a:srgbClr val="1E293B"/>
+                            <a:srgbClr val="0F2942"/>
                           </a:solidFill>
                         </a:defRPr>
                       </a:pPr>
                       <a:r>
-                        <a:t>• 브랜드(루미에르, 아쿠아퓨어, 벨르코어 등), 제품명, 광고 매체(온라인/SNS/인쇄) 선택</a:t>
+                        <a:t>• 사업본부(전장시스템본부, 배터리모듈본부, 정밀기계본부 등), 제품명, 구매계약 매체(온라인/SNS/인쇄) 선택</a:t>
                       </a:r>
                     </a:p>
                     <a:p>
                       <a:pPr>
                         <a:defRPr sz="800">
                           <a:solidFill>
-                            <a:srgbClr val="1E293B"/>
+                            <a:srgbClr val="0F2942"/>
                           </a:solidFill>
                         </a:defRPr>
                       </a:pPr>
@@ -20112,7 +20112,7 @@
                       <a:pPr algn="ctr">
                         <a:defRPr sz="800" b="1">
                           <a:solidFill>
-                            <a:srgbClr val="1E293B"/>
+                            <a:srgbClr val="0F2942"/>
                           </a:solidFill>
                         </a:defRPr>
                       </a:pPr>
@@ -20131,7 +20131,7 @@
                       <a:pPr>
                         <a:defRPr sz="800">
                           <a:solidFill>
-                            <a:srgbClr val="1E293B"/>
+                            <a:srgbClr val="0F2942"/>
                           </a:solidFill>
                         </a:defRPr>
                       </a:pPr>
@@ -20150,7 +20150,7 @@
                       <a:pPr>
                         <a:defRPr sz="800">
                           <a:solidFill>
-                            <a:srgbClr val="1E293B"/>
+                            <a:srgbClr val="0F2942"/>
                           </a:solidFill>
                         </a:defRPr>
                       </a:pPr>
@@ -20162,12 +20162,12 @@
                       <a:pPr>
                         <a:defRPr sz="800">
                           <a:solidFill>
-                            <a:srgbClr val="1E293B"/>
+                            <a:srgbClr val="0F2942"/>
                           </a:solidFill>
                         </a:defRPr>
                       </a:pPr>
                       <a:r>
-                        <a:t>• 오인식된 문장이 있는 경우 2D Canvas 시안 원본 위치를 보며 직접 인라인 수정 가능</a:t>
+                        <a:t>• 오인식된 문장이 있는 경우 2D Canvas 계약·도서 원본 위치를 보며 직접 인라인 수정 가능</a:t>
                       </a:r>
                     </a:p>
                   </a:txBody>
@@ -20183,7 +20183,7 @@
                       <a:pPr algn="ctr">
                         <a:defRPr sz="800" b="1">
                           <a:solidFill>
-                            <a:srgbClr val="1E293B"/>
+                            <a:srgbClr val="0F2942"/>
                           </a:solidFill>
                         </a:defRPr>
                       </a:pPr>
@@ -20202,12 +20202,12 @@
                       <a:pPr>
                         <a:defRPr sz="800">
                           <a:solidFill>
-                            <a:srgbClr val="1E293B"/>
+                            <a:srgbClr val="0F2942"/>
                           </a:solidFill>
                         </a:defRPr>
                       </a:pPr>
                       <a:r>
-                        <a:t>AI 분석 결과 및 위험 문구 확인</a:t>
+                        <a:t>AI 분석 결과 및 위험 조항 확인</a:t>
                       </a:r>
                     </a:p>
                   </a:txBody>
@@ -20221,24 +20221,24 @@
                       <a:pPr>
                         <a:defRPr sz="800">
                           <a:solidFill>
-                            <a:srgbClr val="1E293B"/>
+                            <a:srgbClr val="0F2942"/>
                           </a:solidFill>
                         </a:defRPr>
                       </a:pPr>
                       <a:r>
-                        <a:t>• 3단계 판정 결과(빨강: 금지, 노랑: 주의, 초록: 안전)를 시안 상의 바운딩 박스로 즉시 확인</a:t>
+                        <a:t>• 3단계 판정 결과(빨강: 금지, 노랑: 주의, 초록: 안전)를 계약·도서 상의 바운딩 박스로 즉시 확인</a:t>
                       </a:r>
                     </a:p>
                     <a:p>
                       <a:pPr>
                         <a:defRPr sz="800">
                           <a:solidFill>
-                            <a:srgbClr val="1E293B"/>
+                            <a:srgbClr val="0F2942"/>
                           </a:solidFill>
                         </a:defRPr>
                       </a:pPr>
                       <a:r>
-                        <a:t>• AI가 제안하는 사내 권장 대체 표현을 미리 확인하고 자체적으로 문구 수정 가능</a:t>
+                        <a:t>• AI가 제안하는 사내 권장 대체 표현을 미리 확인하고 자체적으로 조항 수정 가능</a:t>
                       </a:r>
                     </a:p>
                   </a:txBody>
@@ -20254,7 +20254,7 @@
                       <a:pPr algn="ctr">
                         <a:defRPr sz="800" b="1">
                           <a:solidFill>
-                            <a:srgbClr val="1E293B"/>
+                            <a:srgbClr val="0F2942"/>
                           </a:solidFill>
                         </a:defRPr>
                       </a:pPr>
@@ -20273,12 +20273,12 @@
                       <a:pPr>
                         <a:defRPr sz="800">
                           <a:solidFill>
-                            <a:srgbClr val="1E293B"/>
+                            <a:srgbClr val="0F2942"/>
                           </a:solidFill>
                         </a:defRPr>
                       </a:pPr>
                       <a:r>
-                        <a:t>최종 심의 확정 리포트 수령 및 활용</a:t>
+                        <a:t>최종 검증 확정 리포트 수령 및 활용</a:t>
                       </a:r>
                     </a:p>
                   </a:txBody>
@@ -20292,24 +20292,24 @@
                       <a:pPr>
                         <a:defRPr sz="800">
                           <a:solidFill>
-                            <a:srgbClr val="1E293B"/>
+                            <a:srgbClr val="0F2942"/>
                           </a:solidFill>
                         </a:defRPr>
                       </a:pPr>
                       <a:r>
-                        <a:t>• RA 전문가 최종 승인 완료 시 인앱 웹소켓 알림 및 이메일 수신</a:t>
+                        <a:t>• 법무·QA 전문위원 최종 승인 완료 시 인앱 웹소켓 알림 및 이메일 수신</a:t>
                       </a:r>
                     </a:p>
                     <a:p>
                       <a:pPr>
                         <a:defRPr sz="800">
                           <a:solidFill>
-                            <a:srgbClr val="1E293B"/>
+                            <a:srgbClr val="0F2942"/>
                           </a:solidFill>
                         </a:defRPr>
                       </a:pPr>
                       <a:r>
-                        <a:t>• 심의 번호가 날인된 공식 PDF 판정 결과서 다운로드 및 MarketingHub 광고 집행에 첨부</a:t>
+                        <a:t>• 검증 번호가 날인된 공식 PDF 판정 결과서 다운로드 및 SRM-Portal 구매계약 집행에 첨부</a:t>
                       </a:r>
                     </a:p>
                   </a:txBody>
@@ -20582,12 +20582,12 @@
                       <a:pPr algn="ctr">
                         <a:defRPr sz="800" b="1">
                           <a:solidFill>
-                            <a:srgbClr val="1E293B"/>
+                            <a:srgbClr val="0F2942"/>
                           </a:solidFill>
                         </a:defRPr>
                       </a:pPr>
                       <a:r>
-                        <a:t>1. 실증 알림 접수</a:t>
+                        <a:t>1. 시험검증 알림 접수</a:t>
                       </a:r>
                     </a:p>
                   </a:txBody>
@@ -20601,12 +20601,12 @@
                       <a:pPr>
                         <a:defRPr sz="800">
                           <a:solidFill>
-                            <a:srgbClr val="1E293B"/>
+                            <a:srgbClr val="0F2942"/>
                           </a:solidFill>
                         </a:defRPr>
                       </a:pPr>
                       <a:r>
-                        <a:t>실증 필요 소구 문장 검토 요청 수신</a:t>
+                        <a:t>시험검증 필요 기술사양 조항 검토 요청 수신</a:t>
                       </a:r>
                     </a:p>
                   </a:txBody>
@@ -20620,24 +20620,24 @@
                       <a:pPr>
                         <a:defRPr sz="800">
                           <a:solidFill>
-                            <a:srgbClr val="1E293B"/>
+                            <a:srgbClr val="0F2942"/>
                           </a:solidFill>
                         </a:defRPr>
                       </a:pPr>
                       <a:r>
-                        <a:t>• AI 판정 중 '72시간 보습', '탄력 24% 개선' 등 수치/기능성 효능 문장이 감지되면 연구원에게 자동 알림</a:t>
+                        <a:t>• AI 판정 중 '72시간 내열성', '인장강도 24% 개선' 등 수치/핵심규격 성능규격 문장이 감지되면 연구원에게 자동 알림</a:t>
                       </a:r>
                     </a:p>
                     <a:p>
                       <a:pPr>
                         <a:defRPr sz="800">
                           <a:solidFill>
-                            <a:srgbClr val="1E293B"/>
+                            <a:srgbClr val="0F2942"/>
                           </a:solidFill>
                         </a:defRPr>
                       </a:pPr>
                       <a:r>
-                        <a:t>• 대시보드의 [실증 검증 대상함]에서 해당 시안 및 문장 리스트 조회</a:t>
+                        <a:t>• 대시보드의 [시험검증 검증 대상함]에서 해당 계약·도서 및 문장 리스트 조회</a:t>
                       </a:r>
                     </a:p>
                   </a:txBody>
@@ -20653,7 +20653,7 @@
                       <a:pPr algn="ctr">
                         <a:defRPr sz="800" b="1">
                           <a:solidFill>
-                            <a:srgbClr val="1E293B"/>
+                            <a:srgbClr val="0F2942"/>
                           </a:solidFill>
                         </a:defRPr>
                       </a:pPr>
@@ -20672,12 +20672,12 @@
                       <a:pPr>
                         <a:defRPr sz="800">
                           <a:solidFill>
-                            <a:srgbClr val="1E293B"/>
+                            <a:srgbClr val="0F2942"/>
                           </a:solidFill>
                         </a:defRPr>
                       </a:pPr>
                       <a:r>
-                        <a:t>ProductLab 실증 라이브러리 자료 대조</a:t>
+                        <a:t>PLM-Nexus 시험검증 라이브러리 자료 대조</a:t>
                       </a:r>
                     </a:p>
                   </a:txBody>
@@ -20691,24 +20691,24 @@
                       <a:pPr>
                         <a:defRPr sz="800">
                           <a:solidFill>
-                            <a:srgbClr val="1E293B"/>
+                            <a:srgbClr val="0F2942"/>
                           </a:solidFill>
                         </a:defRPr>
                       </a:pPr>
                       <a:r>
-                        <a:t>• ProductLab 연동을 통해 해당 제품의 인체적용시험 보고서, in-vitro 시험성적서, 원료 분석서 검색</a:t>
+                        <a:t>• PLM-Nexus 연동을 통해 해당 제품의 공인신뢰성시험 보고서, in-vitro 시험성적서, 원소재 분석서 검색</a:t>
                       </a:r>
                     </a:p>
                     <a:p>
                       <a:pPr>
                         <a:defRPr sz="800">
                           <a:solidFill>
-                            <a:srgbClr val="1E293B"/>
+                            <a:srgbClr val="0F2942"/>
                           </a:solidFill>
                         </a:defRPr>
                       </a:pPr>
                       <a:r>
-                        <a:t>• 시험 기관, 시험 기간, 피험자 수, 통계적 유의성(p-value &lt; 0.05) 충족 여부 확인</a:t>
+                        <a:t>• 시험 기관, 시험 기간, 시험시료 수, 통계적 유의성(p-value &lt; 0.05) 충족 여부 확인</a:t>
                       </a:r>
                     </a:p>
                   </a:txBody>
@@ -20724,7 +20724,7 @@
                       <a:pPr algn="ctr">
                         <a:defRPr sz="800" b="1">
                           <a:solidFill>
-                            <a:srgbClr val="1E293B"/>
+                            <a:srgbClr val="0F2942"/>
                           </a:solidFill>
                         </a:defRPr>
                       </a:pPr>
@@ -20743,12 +20743,12 @@
                       <a:pPr>
                         <a:defRPr sz="800">
                           <a:solidFill>
-                            <a:srgbClr val="1E293B"/>
+                            <a:srgbClr val="0F2942"/>
                           </a:solidFill>
                         </a:defRPr>
                       </a:pPr>
                       <a:r>
-                        <a:t>실증 성적서 URL 및 페이지 메모 등록</a:t>
+                        <a:t>공인 시험성적서 URL 및 페이지 메모 등록</a:t>
                       </a:r>
                     </a:p>
                   </a:txBody>
@@ -20762,24 +20762,24 @@
                       <a:pPr>
                         <a:defRPr sz="800">
                           <a:solidFill>
-                            <a:srgbClr val="1E293B"/>
+                            <a:srgbClr val="0F2942"/>
                           </a:solidFill>
                         </a:defRPr>
                       </a:pPr>
                       <a:r>
-                        <a:t>• 실증 검증 모달에서 보고서 번호 매핑 및 구체적 근거 페이지(예: '탄력 개선 보고서 p.12') 입력</a:t>
+                        <a:t>• 시험검증 검증 모달에서 보고서 번호 매핑 및 구체적 근거 페이지(예: '인장강도 개선 보고서 p.12') 입력</a:t>
                       </a:r>
                     </a:p>
                     <a:p>
                       <a:pPr>
                         <a:defRPr sz="800">
                           <a:solidFill>
-                            <a:srgbClr val="1E293B"/>
+                            <a:srgbClr val="0F2942"/>
                           </a:solidFill>
                         </a:defRPr>
                       </a:pPr>
                       <a:r>
-                        <a:t>• '실증 완료(MATCHED)' 처리 시 RA 전문가 검토함으로 자동 전달</a:t>
+                        <a:t>• '시험검증 완료(MATCHED)' 처리 시 법무·QA 전문위원 검토함으로 자동 전달</a:t>
                       </a:r>
                     </a:p>
                   </a:txBody>
@@ -20850,7 +20850,7 @@
               </a:defRPr>
             </a:pPr>
             <a:r>
-              <a:t>4. RA 전문가(RA Specialist) 세부 업무 절차</a:t>
+              <a:t>4. 법무·QA 전문위원(QA Specialist) 세부 업무 절차</a:t>
             </a:r>
           </a:p>
         </p:txBody>
@@ -20993,12 +20993,12 @@
                       <a:pPr algn="ctr">
                         <a:defRPr sz="800" b="1">
                           <a:solidFill>
-                            <a:srgbClr val="1E293B"/>
+                            <a:srgbClr val="0F2942"/>
                           </a:solidFill>
                         </a:defRPr>
                       </a:pPr>
                       <a:r>
-                        <a:t>1. 심의 접수</a:t>
+                        <a:t>1. 검증 접수</a:t>
                       </a:r>
                     </a:p>
                   </a:txBody>
@@ -21012,12 +21012,12 @@
                       <a:pPr>
                         <a:defRPr sz="800">
                           <a:solidFill>
-                            <a:srgbClr val="1E293B"/>
+                            <a:srgbClr val="0F2942"/>
                           </a:solidFill>
                         </a:defRPr>
                       </a:pPr>
                       <a:r>
-                        <a:t>심의 대기 큐 및 우선순위 검토</a:t>
+                        <a:t>검토 대기 큐 및 우선순위 검토</a:t>
                       </a:r>
                     </a:p>
                   </a:txBody>
@@ -21031,24 +21031,24 @@
                       <a:pPr>
                         <a:defRPr sz="800">
                           <a:solidFill>
-                            <a:srgbClr val="1E293B"/>
+                            <a:srgbClr val="0F2942"/>
                           </a:solidFill>
                         </a:defRPr>
                       </a:pPr>
                       <a:r>
-                        <a:t>• 마케터가 요청한 심의 건이 접수 큐에 실시간 표시 (긴급 건 배지 및 남은 기한 표시)</a:t>
+                        <a:t>• 구매담당자가 요청한 검증 건이 접수 큐에 실시간 표시 (긴급 건 배지 및 남은 기한 표시)</a:t>
                       </a:r>
                     </a:p>
                     <a:p>
                       <a:pPr>
                         <a:defRPr sz="800">
                           <a:solidFill>
-                            <a:srgbClr val="1E293B"/>
+                            <a:srgbClr val="0F2942"/>
                           </a:solidFill>
                         </a:defRPr>
                       </a:pPr>
                       <a:r>
-                        <a:t>• 브랜드별, 카테고리별 담당 RA 전문가에게 자동 또는 수동 배정</a:t>
+                        <a:t>• 사업부별, 카테고리별 담당 법무·QA 전문위원에게 자동 또는 수동 배정</a:t>
                       </a:r>
                     </a:p>
                   </a:txBody>
@@ -21064,7 +21064,7 @@
                       <a:pPr algn="ctr">
                         <a:defRPr sz="800" b="1">
                           <a:solidFill>
-                            <a:srgbClr val="1E293B"/>
+                            <a:srgbClr val="0F2942"/>
                           </a:solidFill>
                         </a:defRPr>
                       </a:pPr>
@@ -21083,12 +21083,12 @@
                       <a:pPr>
                         <a:defRPr sz="800">
                           <a:solidFill>
-                            <a:srgbClr val="1E293B"/>
+                            <a:srgbClr val="0F2942"/>
                           </a:solidFill>
                         </a:defRPr>
                       </a:pPr>
                       <a:r>
-                        <a:t>2D 시안 위치와 AI 판정 결과 대조</a:t>
+                        <a:t>2D 계약·도서 위치와 AI 판정 결과 대조</a:t>
                       </a:r>
                     </a:p>
                   </a:txBody>
@@ -21102,24 +21102,24 @@
                       <a:pPr>
                         <a:defRPr sz="800">
                           <a:solidFill>
-                            <a:srgbClr val="1E293B"/>
+                            <a:srgbClr val="0F2942"/>
                           </a:solidFill>
                         </a:defRPr>
                       </a:pPr>
                       <a:r>
-                        <a:t>• 좌측: 원본 시안 2D Canvas (위험도별 3색 바운딩 박스 하이라이트)</a:t>
+                        <a:t>• 좌측: 원본 계약·도서 2D Canvas (위험도별 3색 바운딩 박스 하이라이트)</a:t>
                       </a:r>
                     </a:p>
                     <a:p>
                       <a:pPr>
                         <a:defRPr sz="800">
                           <a:solidFill>
-                            <a:srgbClr val="1E293B"/>
+                            <a:srgbClr val="0F2942"/>
                           </a:solidFill>
                         </a:defRPr>
                       </a:pPr>
                       <a:r>
-                        <a:t>• 우측: 문장별 판정 상세 카드 (1단계 룰, 2단계 RAG 식약처 근거 조항, 3단계 LLM 사유) 동시 열람</a:t>
+                        <a:t>• 우측: 문장별 판정 상세 카드 (1단계 룰, 2단계 RAG 공정위·표준원 근거 조항, 3단계 LLM 사유) 동시 열람</a:t>
                       </a:r>
                     </a:p>
                   </a:txBody>
@@ -21135,7 +21135,7 @@
                       <a:pPr algn="ctr">
                         <a:defRPr sz="800" b="1">
                           <a:solidFill>
-                            <a:srgbClr val="1E293B"/>
+                            <a:srgbClr val="0F2942"/>
                           </a:solidFill>
                         </a:defRPr>
                       </a:pPr>
@@ -21154,7 +21154,7 @@
                       <a:pPr>
                         <a:defRPr sz="800">
                           <a:solidFill>
-                            <a:srgbClr val="1E293B"/>
+                            <a:srgbClr val="0F2942"/>
                           </a:solidFill>
                         </a:defRPr>
                       </a:pPr>
@@ -21173,24 +21173,24 @@
                       <a:pPr>
                         <a:defRPr sz="800">
                           <a:solidFill>
-                            <a:srgbClr val="1E293B"/>
+                            <a:srgbClr val="0F2942"/>
                           </a:solidFill>
                         </a:defRPr>
                       </a:pPr>
                       <a:r>
-                        <a:t>• AI 제안 및 사내 승인 대체어 중 최적안을 클릭 한 번으로 채택 반영</a:t>
+                        <a:t>• AI 제안 및 사내 승인 표준대안 중 최적안을 클릭 한 번으로 채택 반영</a:t>
                       </a:r>
                     </a:p>
                     <a:p>
                       <a:pPr>
                         <a:defRPr sz="800">
                           <a:solidFill>
-                            <a:srgbClr val="1E293B"/>
+                            <a:srgbClr val="0F2942"/>
                           </a:solidFill>
                         </a:defRPr>
                       </a:pPr>
                       <a:r>
-                        <a:t>• RA 전문가가 직접 법적 가이드라인에 부합하는 확정 Claim 문구 인라인 입력 가능</a:t>
+                        <a:t>• 법무·QA 전문위원가 직접 법적 가이드라인에 부합하는 확정 Spec 조항 인라인 입력 가능</a:t>
                       </a:r>
                     </a:p>
                   </a:txBody>
@@ -21206,12 +21206,12 @@
                       <a:pPr algn="ctr">
                         <a:defRPr sz="800" b="1">
                           <a:solidFill>
-                            <a:srgbClr val="1E293B"/>
+                            <a:srgbClr val="0F2942"/>
                           </a:solidFill>
                         </a:defRPr>
                       </a:pPr>
                       <a:r>
-                        <a:t>4. 심의 최종 확정</a:t>
+                        <a:t>4. 검증 최종 확정</a:t>
                       </a:r>
                     </a:p>
                   </a:txBody>
@@ -21225,12 +21225,12 @@
                       <a:pPr>
                         <a:defRPr sz="800">
                           <a:solidFill>
-                            <a:srgbClr val="1E293B"/>
+                            <a:srgbClr val="0F2942"/>
                           </a:solidFill>
                         </a:defRPr>
                       </a:pPr>
                       <a:r>
-                        <a:t>심의 확정(Finalize) 및 불변 감사 기록</a:t>
+                        <a:t>검증 확정(Finalize) 및 불변 감사 기록</a:t>
                       </a:r>
                     </a:p>
                   </a:txBody>
@@ -21244,24 +21244,24 @@
                       <a:pPr>
                         <a:defRPr sz="800">
                           <a:solidFill>
-                            <a:srgbClr val="1E293B"/>
+                            <a:srgbClr val="0F2942"/>
                           </a:solidFill>
                         </a:defRPr>
                       </a:pPr>
                       <a:r>
-                        <a:t>• [심의 최종 확정] 버튼 클릭 시 확인 모달 구동 및 전체 판정 스냅샷 암호화 해시 생성</a:t>
+                        <a:t>• [검증 최종 확정] 버튼 클릭 시 확인 모달 구동 및 전체 판정 스냅샷 암호화 해시 생성</a:t>
                       </a:r>
                     </a:p>
                     <a:p>
                       <a:pPr>
                         <a:defRPr sz="800">
                           <a:solidFill>
-                            <a:srgbClr val="1E293B"/>
+                            <a:srgbClr val="0F2942"/>
                           </a:solidFill>
                         </a:defRPr>
                       </a:pPr>
                       <a:r>
-                        <a:t>• 불변 감사 테이블(review_history_immutable)에 영구 저장 및 MarketingHub/마케터에게 즉시 회신</a:t>
+                        <a:t>• 불변 감사 테이블(verify_history_immutable)에 영구 저장 및 SRM-Portal/구매담당자에게 즉시 회신</a:t>
                       </a:r>
                     </a:p>
                   </a:txBody>
@@ -21475,7 +21475,7 @@
                       <a:pPr algn="ctr">
                         <a:defRPr sz="800" b="1">
                           <a:solidFill>
-                            <a:srgbClr val="1E293B"/>
+                            <a:srgbClr val="0F2942"/>
                           </a:solidFill>
                         </a:defRPr>
                       </a:pPr>
@@ -21494,12 +21494,12 @@
                       <a:pPr>
                         <a:defRPr sz="800">
                           <a:solidFill>
-                            <a:srgbClr val="1E293B"/>
+                            <a:srgbClr val="0F2942"/>
                           </a:solidFill>
                         </a:defRPr>
                       </a:pPr>
                       <a:r>
-                        <a:t>금지/주의/대체어 표현 사전 수시 갱신</a:t>
+                        <a:t>금지/주의/표준대안 표현 사전 수시 갱신</a:t>
                       </a:r>
                     </a:p>
                   </a:txBody>
@@ -21513,19 +21513,19 @@
                       <a:pPr>
                         <a:defRPr sz="800">
                           <a:solidFill>
-                            <a:srgbClr val="1E293B"/>
+                            <a:srgbClr val="0F2942"/>
                           </a:solidFill>
                         </a:defRPr>
                       </a:pPr>
                       <a:r>
-                        <a:t>• 식약처 신규 규제 단어 추가 시 단일 등록 및 엑셀 일괄 업로드 지원</a:t>
+                        <a:t>• 공정위·표준원 신규 규제 단어 추가 시 단일 등록 및 엑셀 일괄 업로드 지원</a:t>
                       </a:r>
                     </a:p>
                     <a:p>
                       <a:pPr>
                         <a:defRPr sz="800">
                           <a:solidFill>
-                            <a:srgbClr val="1E293B"/>
+                            <a:srgbClr val="0F2942"/>
                           </a:solidFill>
                         </a:defRPr>
                       </a:pPr>
@@ -21546,7 +21546,7 @@
                       <a:pPr algn="ctr">
                         <a:defRPr sz="800" b="1">
                           <a:solidFill>
-                            <a:srgbClr val="1E293B"/>
+                            <a:srgbClr val="0F2942"/>
                           </a:solidFill>
                         </a:defRPr>
                       </a:pPr>
@@ -21565,12 +21565,12 @@
                       <a:pPr>
                         <a:defRPr sz="800">
                           <a:solidFill>
-                            <a:srgbClr val="1E293B"/>
+                            <a:srgbClr val="0F2942"/>
                           </a:solidFill>
                         </a:defRPr>
                       </a:pPr>
                       <a:r>
-                        <a:t>식약처 가이드라인/판례 벡터화</a:t>
+                        <a:t>공정위·표준원 가이드라인/판례 벡터화</a:t>
                       </a:r>
                     </a:p>
                   </a:txBody>
@@ -21584,19 +21584,19 @@
                       <a:pPr>
                         <a:defRPr sz="800">
                           <a:solidFill>
-                            <a:srgbClr val="1E293B"/>
+                            <a:srgbClr val="0F2942"/>
                           </a:solidFill>
                         </a:defRPr>
                       </a:pPr>
                       <a:r>
-                        <a:t>• 식약처 제품 표시·광고 가이드라인 PDF 업로드 ➔ 문맥 청킹 ➔ pgvector 임베딩 적재</a:t>
+                        <a:t>• 공정위·표준원 구매계약·기술규격 가이드라인 PDF 업로드 ➔ 문맥 청킹 ➔ pgvector 임베딩 적재</a:t>
                       </a:r>
                     </a:p>
                     <a:p>
                       <a:pPr>
                         <a:defRPr sz="800">
                           <a:solidFill>
-                            <a:srgbClr val="1E293B"/>
+                            <a:srgbClr val="0F2942"/>
                           </a:solidFill>
                         </a:defRPr>
                       </a:pPr>
@@ -21617,7 +21617,7 @@
                       <a:pPr algn="ctr">
                         <a:defRPr sz="800" b="1">
                           <a:solidFill>
-                            <a:srgbClr val="1E293B"/>
+                            <a:srgbClr val="0F2942"/>
                           </a:solidFill>
                         </a:defRPr>
                       </a:pPr>
@@ -21636,7 +21636,7 @@
                       <a:pPr>
                         <a:defRPr sz="800">
                           <a:solidFill>
-                            <a:srgbClr val="1E293B"/>
+                            <a:srgbClr val="0F2942"/>
                           </a:solidFill>
                         </a:defRPr>
                       </a:pPr>
@@ -21655,7 +21655,7 @@
                       <a:pPr>
                         <a:defRPr sz="800">
                           <a:solidFill>
-                            <a:srgbClr val="1E293B"/>
+                            <a:srgbClr val="0F2942"/>
                           </a:solidFill>
                         </a:defRPr>
                       </a:pPr>
@@ -21667,12 +21667,12 @@
                       <a:pPr>
                         <a:defRPr sz="800">
                           <a:solidFill>
-                            <a:srgbClr val="1E293B"/>
+                            <a:srgbClr val="0F2942"/>
                           </a:solidFill>
                         </a:defRPr>
                       </a:pPr>
                       <a:r>
-                        <a:t>• 배포 전 과거 심의 100건 골든셋 자동 평가 실행 ➔ 정밀도 90% 이상 검증 후 배포</a:t>
+                        <a:t>• 배포 전 과거 검증 100건 골든셋 자동 평가 실행 ➔ 정밀도 90% 이상 검증 후 배포</a:t>
                       </a:r>
                     </a:p>
                   </a:txBody>
@@ -21969,7 +21969,7 @@
                       <a:pPr algn="ctr">
                         <a:defRPr sz="800" b="1">
                           <a:solidFill>
-                            <a:srgbClr val="1E293B"/>
+                            <a:srgbClr val="0F2942"/>
                           </a:solidFill>
                         </a:defRPr>
                       </a:pPr>
@@ -21981,7 +21981,7 @@
                       <a:pPr algn="ctr">
                         <a:defRPr sz="800" b="1">
                           <a:solidFill>
-                            <a:srgbClr val="1E293B"/>
+                            <a:srgbClr val="0F2942"/>
                           </a:solidFill>
                         </a:defRPr>
                       </a:pPr>
@@ -22000,7 +22000,7 @@
                       <a:pPr algn="ctr">
                         <a:defRPr sz="800" b="1">
                           <a:solidFill>
-                            <a:srgbClr val="1E293B"/>
+                            <a:srgbClr val="0F2942"/>
                           </a:solidFill>
                         </a:defRPr>
                       </a:pPr>
@@ -22012,7 +22012,7 @@
                       <a:pPr>
                         <a:defRPr sz="800">
                           <a:solidFill>
-                            <a:srgbClr val="1E293B"/>
+                            <a:srgbClr val="0F2942"/>
                           </a:solidFill>
                         </a:defRPr>
                       </a:pPr>
@@ -22031,7 +22031,7 @@
                       <a:pPr>
                         <a:defRPr sz="800">
                           <a:solidFill>
-                            <a:srgbClr val="1E293B"/>
+                            <a:srgbClr val="0F2942"/>
                           </a:solidFill>
                         </a:defRPr>
                       </a:pPr>
@@ -22043,12 +22043,12 @@
                       <a:pPr>
                         <a:defRPr sz="800">
                           <a:solidFill>
-                            <a:srgbClr val="1E293B"/>
+                            <a:srgbClr val="0F2942"/>
                           </a:solidFill>
                         </a:defRPr>
                       </a:pPr>
                       <a:r>
-                        <a:t>• 응답: 사번, 성명, 부서코드, 권한 클레임</a:t>
+                        <a:t>• 응답: 사번, 성명, 부서코드, 권한 규격·계약</a:t>
                       </a:r>
                     </a:p>
                   </a:txBody>
@@ -22062,7 +22062,7 @@
                       <a:pPr>
                         <a:defRPr sz="800">
                           <a:solidFill>
-                            <a:srgbClr val="1E293B"/>
+                            <a:srgbClr val="0F2942"/>
                           </a:solidFill>
                         </a:defRPr>
                       </a:pPr>
@@ -22083,24 +22083,24 @@
                       <a:pPr algn="ctr">
                         <a:defRPr sz="800" b="1">
                           <a:solidFill>
-                            <a:srgbClr val="1E293B"/>
+                            <a:srgbClr val="0F2942"/>
                           </a:solidFill>
                         </a:defRPr>
                       </a:pPr>
                       <a:r>
-                        <a:t>MarketingHub</a:t>
+                        <a:t>SRM-Portal</a:t>
                       </a:r>
                     </a:p>
                     <a:p>
                       <a:pPr algn="ctr">
                         <a:defRPr sz="800" b="1">
                           <a:solidFill>
-                            <a:srgbClr val="1E293B"/>
+                            <a:srgbClr val="0F2942"/>
                           </a:solidFill>
                         </a:defRPr>
                       </a:pPr>
                       <a:r>
-                        <a:t>(광고심의 결재)</a:t>
+                        <a:t>(계약·규격검증 결재)</a:t>
                       </a:r>
                     </a:p>
                   </a:txBody>
@@ -22114,7 +22114,7 @@
                       <a:pPr algn="ctr">
                         <a:defRPr sz="800" b="1">
                           <a:solidFill>
-                            <a:srgbClr val="1E293B"/>
+                            <a:srgbClr val="0F2942"/>
                           </a:solidFill>
                         </a:defRPr>
                       </a:pPr>
@@ -22126,12 +22126,12 @@
                       <a:pPr>
                         <a:defRPr sz="800">
                           <a:solidFill>
-                            <a:srgbClr val="1E293B"/>
+                            <a:srgbClr val="0F2942"/>
                           </a:solidFill>
                         </a:defRPr>
                       </a:pPr>
                       <a:r>
-                        <a:t>RA 최종 확정 시 실시간</a:t>
+                        <a:t>QA 최종 확정 시 실시간</a:t>
                       </a:r>
                     </a:p>
                   </a:txBody>
@@ -22145,24 +22145,24 @@
                       <a:pPr>
                         <a:defRPr sz="800">
                           <a:solidFill>
-                            <a:srgbClr val="1E293B"/>
+                            <a:srgbClr val="0F2942"/>
                           </a:solidFill>
                         </a:defRPr>
                       </a:pPr>
                       <a:r>
-                        <a:t>• 요청: 심의번호, 판정등급, 의견, 리포트 URL</a:t>
+                        <a:t>• 요청: 검증번호, 판정등급, 의견, 리포트 URL</a:t>
                       </a:r>
                     </a:p>
                     <a:p>
                       <a:pPr>
                         <a:defRPr sz="800">
                           <a:solidFill>
-                            <a:srgbClr val="1E293B"/>
+                            <a:srgbClr val="0F2942"/>
                           </a:solidFill>
                         </a:defRPr>
                       </a:pPr>
                       <a:r>
-                        <a:t>• 응답: MarketingHub 접수번호, 처리 결과 ACK</a:t>
+                        <a:t>• 응답: SRM-Portal 접수번호, 처리 결과 ACK</a:t>
                       </a:r>
                     </a:p>
                   </a:txBody>
@@ -22176,7 +22176,7 @@
                       <a:pPr>
                         <a:defRPr sz="800">
                           <a:solidFill>
-                            <a:srgbClr val="1E293B"/>
+                            <a:srgbClr val="0F2942"/>
                           </a:solidFill>
                         </a:defRPr>
                       </a:pPr>
@@ -22197,24 +22197,24 @@
                       <a:pPr algn="ctr">
                         <a:defRPr sz="800" b="1">
                           <a:solidFill>
-                            <a:srgbClr val="1E293B"/>
+                            <a:srgbClr val="0F2942"/>
                           </a:solidFill>
                         </a:defRPr>
                       </a:pPr>
                       <a:r>
-                        <a:t>[Option] KT 레몬</a:t>
+                        <a:t>[Option] HB-Monitor</a:t>
                       </a:r>
                     </a:p>
                     <a:p>
                       <a:pPr algn="ctr">
                         <a:defRPr sz="800" b="1">
                           <a:solidFill>
-                            <a:srgbClr val="1E293B"/>
+                            <a:srgbClr val="0F2942"/>
                           </a:solidFill>
                         </a:defRPr>
                       </a:pPr>
                       <a:r>
-                        <a:t>(성분/원료 규제DB)</a:t>
+                        <a:t>(성분/원소재 규제DB)</a:t>
                       </a:r>
                     </a:p>
                   </a:txBody>
@@ -22228,7 +22228,7 @@
                       <a:pPr algn="ctr">
                         <a:defRPr sz="800" b="1">
                           <a:solidFill>
-                            <a:srgbClr val="1E293B"/>
+                            <a:srgbClr val="0F2942"/>
                           </a:solidFill>
                         </a:defRPr>
                       </a:pPr>
@@ -22240,7 +22240,7 @@
                       <a:pPr>
                         <a:defRPr sz="800">
                           <a:solidFill>
-                            <a:srgbClr val="1E293B"/>
+                            <a:srgbClr val="0F2942"/>
                           </a:solidFill>
                         </a:defRPr>
                       </a:pPr>
@@ -22259,7 +22259,7 @@
                       <a:pPr>
                         <a:defRPr sz="800">
                           <a:solidFill>
-                            <a:srgbClr val="1E293B"/>
+                            <a:srgbClr val="0F2942"/>
                           </a:solidFill>
                         </a:defRPr>
                       </a:pPr>
@@ -22271,12 +22271,12 @@
                       <a:pPr>
                         <a:defRPr sz="800">
                           <a:solidFill>
-                            <a:srgbClr val="1E293B"/>
+                            <a:srgbClr val="0F2942"/>
                           </a:solidFill>
                         </a:defRPr>
                       </a:pPr>
                       <a:r>
-                        <a:t>• 응답: 배합한도, 금지원료, 고시 명칭</a:t>
+                        <a:t>• 응답: 유해물질한도, 금지원소재, 고시 명칭</a:t>
                       </a:r>
                     </a:p>
                   </a:txBody>
@@ -22290,7 +22290,7 @@
                       <a:pPr>
                         <a:defRPr sz="800">
                           <a:solidFill>
-                            <a:srgbClr val="1E293B"/>
+                            <a:srgbClr val="0F2942"/>
                           </a:solidFill>
                         </a:defRPr>
                       </a:pPr>
@@ -22311,24 +22311,24 @@
                       <a:pPr algn="ctr">
                         <a:defRPr sz="800" b="1">
                           <a:solidFill>
-                            <a:srgbClr val="1E293B"/>
+                            <a:srgbClr val="0F2942"/>
                           </a:solidFill>
                         </a:defRPr>
                       </a:pPr>
                       <a:r>
-                        <a:t>ProductLab</a:t>
+                        <a:t>PLM-Nexus</a:t>
                       </a:r>
                     </a:p>
                     <a:p>
                       <a:pPr algn="ctr">
                         <a:defRPr sz="800" b="1">
                           <a:solidFill>
-                            <a:srgbClr val="1E293B"/>
+                            <a:srgbClr val="0F2942"/>
                           </a:solidFill>
                         </a:defRPr>
                       </a:pPr>
                       <a:r>
-                        <a:t>(실증자료 라이브러리)</a:t>
+                        <a:t>(시험성적서 라이브러리)</a:t>
                       </a:r>
                     </a:p>
                   </a:txBody>
@@ -22342,7 +22342,7 @@
                       <a:pPr algn="ctr">
                         <a:defRPr sz="800" b="1">
                           <a:solidFill>
-                            <a:srgbClr val="1E293B"/>
+                            <a:srgbClr val="0F2942"/>
                           </a:solidFill>
                         </a:defRPr>
                       </a:pPr>
@@ -22354,7 +22354,7 @@
                       <a:pPr>
                         <a:defRPr sz="800">
                           <a:solidFill>
-                            <a:srgbClr val="1E293B"/>
+                            <a:srgbClr val="0F2942"/>
                           </a:solidFill>
                         </a:defRPr>
                       </a:pPr>
@@ -22373,24 +22373,24 @@
                       <a:pPr>
                         <a:defRPr sz="800">
                           <a:solidFill>
-                            <a:srgbClr val="1E293B"/>
+                            <a:srgbClr val="0F2942"/>
                           </a:solidFill>
                         </a:defRPr>
                       </a:pPr>
                       <a:r>
-                        <a:t>• 요청: 제품코드, 효능 키워드</a:t>
+                        <a:t>• 요청: 제품코드, 성능규격 키워드</a:t>
                       </a:r>
                     </a:p>
                     <a:p>
                       <a:pPr>
                         <a:defRPr sz="800">
                           <a:solidFill>
-                            <a:srgbClr val="1E293B"/>
+                            <a:srgbClr val="0F2942"/>
                           </a:solidFill>
                         </a:defRPr>
                       </a:pPr>
                       <a:r>
-                        <a:t>• 응답: 임상시험 보고서 목록, URL, 시험결과</a:t>
+                        <a:t>• 응답: 신뢰성시험 보고서 목록, URL, 시험결과</a:t>
                       </a:r>
                     </a:p>
                   </a:txBody>
@@ -22404,7 +22404,7 @@
                       <a:pPr>
                         <a:defRPr sz="800">
                           <a:solidFill>
-                            <a:srgbClr val="1E293B"/>
+                            <a:srgbClr val="0F2942"/>
                           </a:solidFill>
                         </a:defRPr>
                       </a:pPr>
